--- a/Presentatie/Maxime_Mylle_Eindwerk_Resultaten.pptx
+++ b/Presentatie/Maxime_Mylle_Eindwerk_Resultaten.pptx
@@ -9573,7 +9573,7 @@
           <a:bodyPr/>
           <a:lstStyle/>
           <a:p>
-            <a:endParaRPr lang="en-US"/>
+            <a:endParaRPr lang="en-US" dirty="0"/>
           </a:p>
         </p:txBody>
       </p:sp>
@@ -10021,13 +10021,13 @@
       </p:sp>
       <p:sp>
         <p:nvSpPr>
-          <p:cNvPr id="15" name="Text 12"/>
-          <p:cNvSpPr/>
-          <p:nvPr/>
-        </p:nvSpPr>
-        <p:spPr>
-          <a:xfrm>
-            <a:off x="6629400" y="2706624"/>
+          <p:cNvPr id="17" name="Text 14"/>
+          <p:cNvSpPr/>
+          <p:nvPr/>
+        </p:nvSpPr>
+        <p:spPr>
+          <a:xfrm>
+            <a:off x="6629400" y="2627132"/>
             <a:ext cx="2057400" cy="201168"/>
           </a:xfrm>
           <a:prstGeom prst="rect">
@@ -10052,7 +10052,7 @@
                 <a:ea typeface="Calibri" pitchFamily="34" charset="-122"/>
                 <a:cs typeface="Calibri" pitchFamily="34" charset="-120"/>
               </a:rPr>
-              <a:t>Q1 2021</a:t>
+              <a:t>Q4 2021</a:t>
             </a:r>
             <a:endParaRPr lang="en-US" sz="900" dirty="0"/>
           </a:p>
@@ -10060,13 +10060,13 @@
       </p:sp>
       <p:sp>
         <p:nvSpPr>
-          <p:cNvPr id="16" name="Text 13"/>
-          <p:cNvSpPr/>
-          <p:nvPr/>
-        </p:nvSpPr>
-        <p:spPr>
-          <a:xfrm>
-            <a:off x="6629400" y="2898648"/>
+          <p:cNvPr id="18" name="Text 15"/>
+          <p:cNvSpPr/>
+          <p:nvPr/>
+        </p:nvSpPr>
+        <p:spPr>
+          <a:xfrm>
+            <a:off x="6629400" y="2819156"/>
             <a:ext cx="2057400" cy="256032"/>
           </a:xfrm>
           <a:prstGeom prst="rect">
@@ -10091,7 +10091,7 @@
                 <a:ea typeface="Calibri" pitchFamily="34" charset="-122"/>
                 <a:cs typeface="Calibri" pitchFamily="34" charset="-120"/>
               </a:rPr>
-              <a:t>Derde golf — vergelijkbaar niveau</a:t>
+              <a:t>Delta-variant / omicron</a:t>
             </a:r>
             <a:endParaRPr lang="en-US" sz="900" dirty="0"/>
           </a:p>
@@ -10099,13 +10099,13 @@
       </p:sp>
       <p:sp>
         <p:nvSpPr>
-          <p:cNvPr id="17" name="Text 14"/>
-          <p:cNvSpPr/>
-          <p:nvPr/>
-        </p:nvSpPr>
-        <p:spPr>
-          <a:xfrm>
-            <a:off x="6629400" y="3227832"/>
+          <p:cNvPr id="19" name="Text 16"/>
+          <p:cNvSpPr/>
+          <p:nvPr/>
+        </p:nvSpPr>
+        <p:spPr>
+          <a:xfrm>
+            <a:off x="6629400" y="3148340"/>
             <a:ext cx="2057400" cy="201168"/>
           </a:xfrm>
           <a:prstGeom prst="rect">
@@ -10130,7 +10130,7 @@
                 <a:ea typeface="Calibri" pitchFamily="34" charset="-122"/>
                 <a:cs typeface="Calibri" pitchFamily="34" charset="-120"/>
               </a:rPr>
-              <a:t>Q4 2021</a:t>
+              <a:t>Q1 2022</a:t>
             </a:r>
             <a:endParaRPr lang="en-US" sz="900" dirty="0"/>
           </a:p>
@@ -10138,13 +10138,13 @@
       </p:sp>
       <p:sp>
         <p:nvSpPr>
-          <p:cNvPr id="18" name="Text 15"/>
-          <p:cNvSpPr/>
-          <p:nvPr/>
-        </p:nvSpPr>
-        <p:spPr>
-          <a:xfrm>
-            <a:off x="6629400" y="3419856"/>
+          <p:cNvPr id="20" name="Text 17"/>
+          <p:cNvSpPr/>
+          <p:nvPr/>
+        </p:nvSpPr>
+        <p:spPr>
+          <a:xfrm>
+            <a:off x="6629400" y="3340364"/>
             <a:ext cx="2057400" cy="256032"/>
           </a:xfrm>
           <a:prstGeom prst="rect">
@@ -10169,7 +10169,7 @@
                 <a:ea typeface="Calibri" pitchFamily="34" charset="-122"/>
                 <a:cs typeface="Calibri" pitchFamily="34" charset="-120"/>
               </a:rPr>
-              <a:t>Delta-variant</a:t>
+              <a:t>Omicron — hoogste piek</a:t>
             </a:r>
             <a:endParaRPr lang="en-US" sz="900" dirty="0"/>
           </a:p>
@@ -10177,13 +10177,13 @@
       </p:sp>
       <p:sp>
         <p:nvSpPr>
-          <p:cNvPr id="19" name="Text 16"/>
-          <p:cNvSpPr/>
-          <p:nvPr/>
-        </p:nvSpPr>
-        <p:spPr>
-          <a:xfrm>
-            <a:off x="6629400" y="3749040"/>
+          <p:cNvPr id="21" name="Text 18"/>
+          <p:cNvSpPr/>
+          <p:nvPr/>
+        </p:nvSpPr>
+        <p:spPr>
+          <a:xfrm>
+            <a:off x="6629400" y="3669548"/>
             <a:ext cx="2057400" cy="201168"/>
           </a:xfrm>
           <a:prstGeom prst="rect">
@@ -10208,7 +10208,7 @@
                 <a:ea typeface="Calibri" pitchFamily="34" charset="-122"/>
                 <a:cs typeface="Calibri" pitchFamily="34" charset="-120"/>
               </a:rPr>
-              <a:t>Q1 2022</a:t>
+              <a:t>2023+</a:t>
             </a:r>
             <a:endParaRPr lang="en-US" sz="900" dirty="0"/>
           </a:p>
@@ -10216,91 +10216,13 @@
       </p:sp>
       <p:sp>
         <p:nvSpPr>
-          <p:cNvPr id="20" name="Text 17"/>
-          <p:cNvSpPr/>
-          <p:nvPr/>
-        </p:nvSpPr>
-        <p:spPr>
-          <a:xfrm>
-            <a:off x="6629400" y="3941064"/>
-            <a:ext cx="2057400" cy="256032"/>
-          </a:xfrm>
-          <a:prstGeom prst="rect">
-            <a:avLst/>
-          </a:prstGeom>
-          <a:noFill/>
-          <a:ln/>
-        </p:spPr>
-        <p:txBody>
-          <a:bodyPr wrap="square" rtlCol="0" anchor="ctr"/>
-          <a:lstStyle/>
-          <a:p>
-            <a:pPr marL="0" indent="0">
-              <a:buNone/>
-            </a:pPr>
-            <a:r>
-              <a:rPr lang="en-US" sz="900" dirty="0">
-                <a:solidFill>
-                  <a:srgbClr val="64748B"/>
-                </a:solidFill>
-                <a:latin typeface="Calibri" pitchFamily="34" charset="0"/>
-                <a:ea typeface="Calibri" pitchFamily="34" charset="-122"/>
-                <a:cs typeface="Calibri" pitchFamily="34" charset="-120"/>
-              </a:rPr>
-              <a:t>Omicron — hoogste piek</a:t>
-            </a:r>
-            <a:endParaRPr lang="en-US" sz="900" dirty="0"/>
-          </a:p>
-        </p:txBody>
-      </p:sp>
-      <p:sp>
-        <p:nvSpPr>
-          <p:cNvPr id="21" name="Text 18"/>
-          <p:cNvSpPr/>
-          <p:nvPr/>
-        </p:nvSpPr>
-        <p:spPr>
-          <a:xfrm>
-            <a:off x="6629400" y="4270248"/>
-            <a:ext cx="2057400" cy="201168"/>
-          </a:xfrm>
-          <a:prstGeom prst="rect">
-            <a:avLst/>
-          </a:prstGeom>
-          <a:noFill/>
-          <a:ln/>
-        </p:spPr>
-        <p:txBody>
-          <a:bodyPr wrap="square" rtlCol="0" anchor="ctr"/>
-          <a:lstStyle/>
-          <a:p>
-            <a:pPr marL="0" indent="0">
-              <a:buNone/>
-            </a:pPr>
-            <a:r>
-              <a:rPr lang="en-US" sz="900" b="1" dirty="0">
-                <a:solidFill>
-                  <a:srgbClr val="0D9488"/>
-                </a:solidFill>
-                <a:latin typeface="Calibri" pitchFamily="34" charset="0"/>
-                <a:ea typeface="Calibri" pitchFamily="34" charset="-122"/>
-                <a:cs typeface="Calibri" pitchFamily="34" charset="-120"/>
-              </a:rPr>
-              <a:t>2023+</a:t>
-            </a:r>
-            <a:endParaRPr lang="en-US" sz="900" dirty="0"/>
-          </a:p>
-        </p:txBody>
-      </p:sp>
-      <p:sp>
-        <p:nvSpPr>
           <p:cNvPr id="22" name="Text 19"/>
           <p:cNvSpPr/>
           <p:nvPr/>
         </p:nvSpPr>
         <p:spPr>
           <a:xfrm>
-            <a:off x="6629400" y="4462272"/>
+            <a:off x="6629400" y="3861572"/>
             <a:ext cx="2057400" cy="256032"/>
           </a:xfrm>
           <a:prstGeom prst="rect">
@@ -10367,6 +10289,41 @@
               <a:t>Gebaseerd op pathology_startdate · ICD-10 code B97.2 · data per kwartaal</a:t>
             </a:r>
             <a:endParaRPr lang="en-US" sz="850" dirty="0"/>
+          </a:p>
+        </p:txBody>
+      </p:sp>
+      <p:sp>
+        <p:nvSpPr>
+          <p:cNvPr id="24" name="TextBox 23">
+            <a:extLst>
+              <a:ext uri="{FF2B5EF4-FFF2-40B4-BE49-F238E27FC236}">
+                <a16:creationId xmlns:a16="http://schemas.microsoft.com/office/drawing/2014/main" id="{52100147-CAF2-EA93-DEA1-105A41EFFE0E}"/>
+              </a:ext>
+            </a:extLst>
+          </p:cNvPr>
+          <p:cNvSpPr txBox="1"/>
+          <p:nvPr/>
+        </p:nvSpPr>
+        <p:spPr>
+          <a:xfrm>
+            <a:off x="7067006" y="822960"/>
+            <a:ext cx="2645228" cy="200055"/>
+          </a:xfrm>
+          <a:prstGeom prst="rect">
+            <a:avLst/>
+          </a:prstGeom>
+          <a:noFill/>
+        </p:spPr>
+        <p:txBody>
+          <a:bodyPr wrap="square" rtlCol="0">
+            <a:spAutoFit/>
+          </a:bodyPr>
+          <a:lstStyle/>
+          <a:p>
+            <a:r>
+              <a:rPr lang="en-US" sz="700" dirty="0"/>
+              <a:t>https://www.datawrapper.de/_/RUjje/</a:t>
+            </a:r>
           </a:p>
         </p:txBody>
       </p:sp>
